--- a/topic08-inheritance/unit-08a-lectures/talk-1-inheritance/a-inheritanceV1.pptx
+++ b/topic08-inheritance/unit-08a-lectures/talk-1-inheritance/a-inheritanceV1.pptx
@@ -2144,7 +2144,7 @@
           </a:ln>
           <a:extLst>
             <a:ext uri="{C572A759-6A51-4108-AA02-DFA0A04FC94B}">
-              <ma14:wrappingTextBoxFlag xmlns="" xmlns:ma14="http://schemas.microsoft.com/office/mac/drawingml/2011/main" val="1"/>
+              <ma14:wrappingTextBoxFlag xmlns:ma14="http://schemas.microsoft.com/office/mac/drawingml/2011/main" xmlns="" val="1"/>
             </a:ext>
           </a:extLst>
         </p:spPr>
@@ -2231,7 +2231,7 @@
             <a:effectLst/>
             <a:extLst>
               <a:ext uri="{C572A759-6A51-4108-AA02-DFA0A04FC94B}">
-                <ma14:wrappingTextBoxFlag xmlns="" xmlns:ma14="http://schemas.microsoft.com/office/mac/drawingml/2011/main" val="1"/>
+                <ma14:wrappingTextBoxFlag xmlns:ma14="http://schemas.microsoft.com/office/mac/drawingml/2011/main" xmlns="" val="1"/>
               </a:ext>
             </a:extLst>
           </p:spPr>
@@ -2304,7 +2304,7 @@
             <a:effectLst/>
             <a:extLst>
               <a:ext uri="{C572A759-6A51-4108-AA02-DFA0A04FC94B}">
-                <ma14:wrappingTextBoxFlag xmlns="" xmlns:ma14="http://schemas.microsoft.com/office/mac/drawingml/2011/main" val="1"/>
+                <ma14:wrappingTextBoxFlag xmlns:ma14="http://schemas.microsoft.com/office/mac/drawingml/2011/main" xmlns="" val="1"/>
               </a:ext>
             </a:extLst>
           </p:spPr>
@@ -2355,7 +2355,7 @@
             <a:effectLst/>
             <a:extLst>
               <a:ext uri="{C572A759-6A51-4108-AA02-DFA0A04FC94B}">
-                <ma14:wrappingTextBoxFlag xmlns="" xmlns:ma14="http://schemas.microsoft.com/office/mac/drawingml/2011/main" val="1"/>
+                <ma14:wrappingTextBoxFlag xmlns:ma14="http://schemas.microsoft.com/office/mac/drawingml/2011/main" xmlns="" val="1"/>
               </a:ext>
             </a:extLst>
           </p:spPr>
@@ -7391,7 +7391,12 @@
             <p:ph type="title"/>
           </p:nvPr>
         </p:nvSpPr>
-        <p:spPr/>
+        <p:spPr>
+          <a:xfrm>
+            <a:off x="609600" y="461241"/>
+            <a:ext cx="10972800" cy="1143000"/>
+          </a:xfrm>
+        </p:spPr>
         <p:txBody>
           <a:bodyPr/>
           <a:lstStyle/>
@@ -7458,6 +7463,50 @@
           </a:ln>
         </p:spPr>
       </p:pic>
+      <p:sp>
+        <p:nvSpPr>
+          <p:cNvPr id="3" name="Slide Number Placeholder 3">
+            <a:extLst>
+              <a:ext uri="{FF2B5EF4-FFF2-40B4-BE49-F238E27FC236}">
+                <a16:creationId xmlns:a16="http://schemas.microsoft.com/office/drawing/2014/main" id="{4A825D5C-7882-D25C-1FFB-0A39B8238539}"/>
+              </a:ext>
+            </a:extLst>
+          </p:cNvPr>
+          <p:cNvSpPr>
+            <a:spLocks noGrp="1"/>
+          </p:cNvSpPr>
+          <p:nvPr>
+            <p:ph type="sldNum" sz="quarter" idx="12"/>
+          </p:nvPr>
+        </p:nvSpPr>
+        <p:spPr>
+          <a:xfrm>
+            <a:off x="8737600" y="6356351"/>
+            <a:ext cx="2844800" cy="365125"/>
+          </a:xfrm>
+        </p:spPr>
+        <p:txBody>
+          <a:bodyPr/>
+          <a:lstStyle/>
+          <a:p>
+            <a:pPr>
+              <a:spcAft>
+                <a:spcPts val="600"/>
+              </a:spcAft>
+            </a:pPr>
+            <a:fld id="{B6F15528-21DE-4FAA-801E-634DDDAF4B2B}" type="slidenum">
+              <a:rPr lang="en-US" smtClean="0"/>
+              <a:pPr>
+                <a:spcAft>
+                  <a:spcPts val="600"/>
+                </a:spcAft>
+              </a:pPr>
+              <a:t>10</a:t>
+            </a:fld>
+            <a:endParaRPr lang="en-US"/>
+          </a:p>
+        </p:txBody>
+      </p:sp>
     </p:spTree>
     <p:extLst>
       <p:ext uri="{BB962C8B-B14F-4D97-AF65-F5344CB8AC3E}">
@@ -7784,6 +7833,147 @@
           <a:lstStyle/>
           <a:p>
             <a:endParaRPr lang="en-US" dirty="0"/>
+          </a:p>
+        </p:txBody>
+      </p:sp>
+      <p:sp>
+        <p:nvSpPr>
+          <p:cNvPr id="5" name="Slide Number Placeholder 3">
+            <a:extLst>
+              <a:ext uri="{FF2B5EF4-FFF2-40B4-BE49-F238E27FC236}">
+                <a16:creationId xmlns:a16="http://schemas.microsoft.com/office/drawing/2014/main" id="{E80DF9B2-72C5-939F-2640-6AA9F6266580}"/>
+              </a:ext>
+            </a:extLst>
+          </p:cNvPr>
+          <p:cNvSpPr txBox="1">
+            <a:spLocks/>
+          </p:cNvSpPr>
+          <p:nvPr/>
+        </p:nvSpPr>
+        <p:spPr>
+          <a:xfrm>
+            <a:off x="8890000" y="6508751"/>
+            <a:ext cx="2844800" cy="365125"/>
+          </a:xfrm>
+          <a:prstGeom prst="rect">
+            <a:avLst/>
+          </a:prstGeom>
+        </p:spPr>
+        <p:txBody>
+          <a:bodyPr vert="horz" lIns="91440" tIns="45720" rIns="91440" bIns="45720" rtlCol="0" anchor="ctr"/>
+          <a:lstStyle>
+            <a:defPPr>
+              <a:defRPr lang="en-US"/>
+            </a:defPPr>
+            <a:lvl1pPr marL="0" algn="r" defTabSz="914400" rtl="0" eaLnBrk="1" latinLnBrk="0" hangingPunct="1">
+              <a:defRPr sz="1200" kern="1200">
+                <a:solidFill>
+                  <a:schemeClr val="tx1">
+                    <a:tint val="75000"/>
+                  </a:schemeClr>
+                </a:solidFill>
+                <a:latin typeface="+mn-lt"/>
+                <a:ea typeface="+mn-ea"/>
+                <a:cs typeface="+mn-cs"/>
+              </a:defRPr>
+            </a:lvl1pPr>
+            <a:lvl2pPr marL="457200" algn="l" defTabSz="914400" rtl="0" eaLnBrk="1" latinLnBrk="0" hangingPunct="1">
+              <a:defRPr sz="1800" kern="1200">
+                <a:solidFill>
+                  <a:schemeClr val="tx1"/>
+                </a:solidFill>
+                <a:latin typeface="+mn-lt"/>
+                <a:ea typeface="+mn-ea"/>
+                <a:cs typeface="+mn-cs"/>
+              </a:defRPr>
+            </a:lvl2pPr>
+            <a:lvl3pPr marL="914400" algn="l" defTabSz="914400" rtl="0" eaLnBrk="1" latinLnBrk="0" hangingPunct="1">
+              <a:defRPr sz="1800" kern="1200">
+                <a:solidFill>
+                  <a:schemeClr val="tx1"/>
+                </a:solidFill>
+                <a:latin typeface="+mn-lt"/>
+                <a:ea typeface="+mn-ea"/>
+                <a:cs typeface="+mn-cs"/>
+              </a:defRPr>
+            </a:lvl3pPr>
+            <a:lvl4pPr marL="1371600" algn="l" defTabSz="914400" rtl="0" eaLnBrk="1" latinLnBrk="0" hangingPunct="1">
+              <a:defRPr sz="1800" kern="1200">
+                <a:solidFill>
+                  <a:schemeClr val="tx1"/>
+                </a:solidFill>
+                <a:latin typeface="+mn-lt"/>
+                <a:ea typeface="+mn-ea"/>
+                <a:cs typeface="+mn-cs"/>
+              </a:defRPr>
+            </a:lvl4pPr>
+            <a:lvl5pPr marL="1828800" algn="l" defTabSz="914400" rtl="0" eaLnBrk="1" latinLnBrk="0" hangingPunct="1">
+              <a:defRPr sz="1800" kern="1200">
+                <a:solidFill>
+                  <a:schemeClr val="tx1"/>
+                </a:solidFill>
+                <a:latin typeface="+mn-lt"/>
+                <a:ea typeface="+mn-ea"/>
+                <a:cs typeface="+mn-cs"/>
+              </a:defRPr>
+            </a:lvl5pPr>
+            <a:lvl6pPr marL="2286000" algn="l" defTabSz="914400" rtl="0" eaLnBrk="1" latinLnBrk="0" hangingPunct="1">
+              <a:defRPr sz="1800" kern="1200">
+                <a:solidFill>
+                  <a:schemeClr val="tx1"/>
+                </a:solidFill>
+                <a:latin typeface="+mn-lt"/>
+                <a:ea typeface="+mn-ea"/>
+                <a:cs typeface="+mn-cs"/>
+              </a:defRPr>
+            </a:lvl6pPr>
+            <a:lvl7pPr marL="2743200" algn="l" defTabSz="914400" rtl="0" eaLnBrk="1" latinLnBrk="0" hangingPunct="1">
+              <a:defRPr sz="1800" kern="1200">
+                <a:solidFill>
+                  <a:schemeClr val="tx1"/>
+                </a:solidFill>
+                <a:latin typeface="+mn-lt"/>
+                <a:ea typeface="+mn-ea"/>
+                <a:cs typeface="+mn-cs"/>
+              </a:defRPr>
+            </a:lvl7pPr>
+            <a:lvl8pPr marL="3200400" algn="l" defTabSz="914400" rtl="0" eaLnBrk="1" latinLnBrk="0" hangingPunct="1">
+              <a:defRPr sz="1800" kern="1200">
+                <a:solidFill>
+                  <a:schemeClr val="tx1"/>
+                </a:solidFill>
+                <a:latin typeface="+mn-lt"/>
+                <a:ea typeface="+mn-ea"/>
+                <a:cs typeface="+mn-cs"/>
+              </a:defRPr>
+            </a:lvl8pPr>
+            <a:lvl9pPr marL="3657600" algn="l" defTabSz="914400" rtl="0" eaLnBrk="1" latinLnBrk="0" hangingPunct="1">
+              <a:defRPr sz="1800" kern="1200">
+                <a:solidFill>
+                  <a:schemeClr val="tx1"/>
+                </a:solidFill>
+                <a:latin typeface="+mn-lt"/>
+                <a:ea typeface="+mn-ea"/>
+                <a:cs typeface="+mn-cs"/>
+              </a:defRPr>
+            </a:lvl9pPr>
+          </a:lstStyle>
+          <a:p>
+            <a:pPr>
+              <a:spcAft>
+                <a:spcPts val="600"/>
+              </a:spcAft>
+            </a:pPr>
+            <a:fld id="{B6F15528-21DE-4FAA-801E-634DDDAF4B2B}" type="slidenum">
+              <a:rPr lang="en-US" smtClean="0"/>
+              <a:pPr>
+                <a:spcAft>
+                  <a:spcPts val="600"/>
+                </a:spcAft>
+              </a:pPr>
+              <a:t>2</a:t>
+            </a:fld>
+            <a:endParaRPr lang="en-US"/>
           </a:p>
         </p:txBody>
       </p:sp>
@@ -8487,6 +8677,50 @@
           </p:style>
         </p:cxnSp>
       </p:grpSp>
+      <p:sp>
+        <p:nvSpPr>
+          <p:cNvPr id="3" name="Slide Number Placeholder 3">
+            <a:extLst>
+              <a:ext uri="{FF2B5EF4-FFF2-40B4-BE49-F238E27FC236}">
+                <a16:creationId xmlns:a16="http://schemas.microsoft.com/office/drawing/2014/main" id="{1D13D7E9-06B9-AE66-79EB-212006594E0C}"/>
+              </a:ext>
+            </a:extLst>
+          </p:cNvPr>
+          <p:cNvSpPr>
+            <a:spLocks noGrp="1"/>
+          </p:cNvSpPr>
+          <p:nvPr>
+            <p:ph type="sldNum" sz="quarter" idx="12"/>
+          </p:nvPr>
+        </p:nvSpPr>
+        <p:spPr>
+          <a:xfrm>
+            <a:off x="8737600" y="6356351"/>
+            <a:ext cx="2844800" cy="365125"/>
+          </a:xfrm>
+        </p:spPr>
+        <p:txBody>
+          <a:bodyPr/>
+          <a:lstStyle/>
+          <a:p>
+            <a:pPr>
+              <a:spcAft>
+                <a:spcPts val="600"/>
+              </a:spcAft>
+            </a:pPr>
+            <a:fld id="{B6F15528-21DE-4FAA-801E-634DDDAF4B2B}" type="slidenum">
+              <a:rPr lang="en-US" smtClean="0"/>
+              <a:pPr>
+                <a:spcAft>
+                  <a:spcPts val="600"/>
+                </a:spcAft>
+              </a:pPr>
+              <a:t>4</a:t>
+            </a:fld>
+            <a:endParaRPr lang="en-US"/>
+          </a:p>
+        </p:txBody>
+      </p:sp>
     </p:spTree>
     <p:extLst>
       <p:ext uri="{BB962C8B-B14F-4D97-AF65-F5344CB8AC3E}">
@@ -9455,6 +9689,50 @@
           </a:fontRef>
         </p:style>
       </p:cxnSp>
+      <p:sp>
+        <p:nvSpPr>
+          <p:cNvPr id="4" name="Slide Number Placeholder 3">
+            <a:extLst>
+              <a:ext uri="{FF2B5EF4-FFF2-40B4-BE49-F238E27FC236}">
+                <a16:creationId xmlns:a16="http://schemas.microsoft.com/office/drawing/2014/main" id="{BA66D67A-CF89-52E7-4073-7A364DB95267}"/>
+              </a:ext>
+            </a:extLst>
+          </p:cNvPr>
+          <p:cNvSpPr>
+            <a:spLocks noGrp="1"/>
+          </p:cNvSpPr>
+          <p:nvPr>
+            <p:ph type="sldNum" sz="quarter" idx="12"/>
+          </p:nvPr>
+        </p:nvSpPr>
+        <p:spPr>
+          <a:xfrm>
+            <a:off x="8737600" y="6356351"/>
+            <a:ext cx="2844800" cy="365125"/>
+          </a:xfrm>
+        </p:spPr>
+        <p:txBody>
+          <a:bodyPr/>
+          <a:lstStyle/>
+          <a:p>
+            <a:pPr>
+              <a:spcAft>
+                <a:spcPts val="600"/>
+              </a:spcAft>
+            </a:pPr>
+            <a:fld id="{B6F15528-21DE-4FAA-801E-634DDDAF4B2B}" type="slidenum">
+              <a:rPr lang="en-US" smtClean="0"/>
+              <a:pPr>
+                <a:spcAft>
+                  <a:spcPts val="600"/>
+                </a:spcAft>
+              </a:pPr>
+              <a:t>6</a:t>
+            </a:fld>
+            <a:endParaRPr lang="en-US"/>
+          </a:p>
+        </p:txBody>
+      </p:sp>
     </p:spTree>
     <p:extLst>
       <p:ext uri="{BB962C8B-B14F-4D97-AF65-F5344CB8AC3E}">
@@ -9852,6 +10130,50 @@
           </a:fontRef>
         </p:style>
       </p:cxnSp>
+      <p:sp>
+        <p:nvSpPr>
+          <p:cNvPr id="6" name="Slide Number Placeholder 3">
+            <a:extLst>
+              <a:ext uri="{FF2B5EF4-FFF2-40B4-BE49-F238E27FC236}">
+                <a16:creationId xmlns:a16="http://schemas.microsoft.com/office/drawing/2014/main" id="{475CC093-5875-B09A-8D30-4086C2375FAE}"/>
+              </a:ext>
+            </a:extLst>
+          </p:cNvPr>
+          <p:cNvSpPr>
+            <a:spLocks noGrp="1"/>
+          </p:cNvSpPr>
+          <p:nvPr>
+            <p:ph type="sldNum" sz="quarter" idx="12"/>
+          </p:nvPr>
+        </p:nvSpPr>
+        <p:spPr>
+          <a:xfrm>
+            <a:off x="8737600" y="6356351"/>
+            <a:ext cx="2844800" cy="365125"/>
+          </a:xfrm>
+        </p:spPr>
+        <p:txBody>
+          <a:bodyPr/>
+          <a:lstStyle/>
+          <a:p>
+            <a:pPr>
+              <a:spcAft>
+                <a:spcPts val="600"/>
+              </a:spcAft>
+            </a:pPr>
+            <a:fld id="{B6F15528-21DE-4FAA-801E-634DDDAF4B2B}" type="slidenum">
+              <a:rPr lang="en-US" smtClean="0"/>
+              <a:pPr>
+                <a:spcAft>
+                  <a:spcPts val="600"/>
+                </a:spcAft>
+              </a:pPr>
+              <a:t>7</a:t>
+            </a:fld>
+            <a:endParaRPr lang="en-US"/>
+          </a:p>
+        </p:txBody>
+      </p:sp>
     </p:spTree>
     <p:extLst>
       <p:ext uri="{BB962C8B-B14F-4D97-AF65-F5344CB8AC3E}">
@@ -10322,6 +10644,50 @@
           </a:fontRef>
         </p:style>
       </p:cxnSp>
+      <p:sp>
+        <p:nvSpPr>
+          <p:cNvPr id="7" name="Slide Number Placeholder 3">
+            <a:extLst>
+              <a:ext uri="{FF2B5EF4-FFF2-40B4-BE49-F238E27FC236}">
+                <a16:creationId xmlns:a16="http://schemas.microsoft.com/office/drawing/2014/main" id="{C18DEDB3-92F8-B698-AC78-D1D7ACF7EAE3}"/>
+              </a:ext>
+            </a:extLst>
+          </p:cNvPr>
+          <p:cNvSpPr>
+            <a:spLocks noGrp="1"/>
+          </p:cNvSpPr>
+          <p:nvPr>
+            <p:ph type="sldNum" sz="quarter" idx="12"/>
+          </p:nvPr>
+        </p:nvSpPr>
+        <p:spPr>
+          <a:xfrm>
+            <a:off x="8737600" y="6356351"/>
+            <a:ext cx="2844800" cy="365125"/>
+          </a:xfrm>
+        </p:spPr>
+        <p:txBody>
+          <a:bodyPr/>
+          <a:lstStyle/>
+          <a:p>
+            <a:pPr>
+              <a:spcAft>
+                <a:spcPts val="600"/>
+              </a:spcAft>
+            </a:pPr>
+            <a:fld id="{B6F15528-21DE-4FAA-801E-634DDDAF4B2B}" type="slidenum">
+              <a:rPr lang="en-US" smtClean="0"/>
+              <a:pPr>
+                <a:spcAft>
+                  <a:spcPts val="600"/>
+                </a:spcAft>
+              </a:pPr>
+              <a:t>8</a:t>
+            </a:fld>
+            <a:endParaRPr lang="en-US"/>
+          </a:p>
+        </p:txBody>
+      </p:sp>
     </p:spTree>
     <p:extLst>
       <p:ext uri="{BB962C8B-B14F-4D97-AF65-F5344CB8AC3E}">
@@ -10792,6 +11158,50 @@
           </a:fontRef>
         </p:style>
       </p:cxnSp>
+      <p:sp>
+        <p:nvSpPr>
+          <p:cNvPr id="7" name="Slide Number Placeholder 3">
+            <a:extLst>
+              <a:ext uri="{FF2B5EF4-FFF2-40B4-BE49-F238E27FC236}">
+                <a16:creationId xmlns:a16="http://schemas.microsoft.com/office/drawing/2014/main" id="{3C6EDC56-659F-C994-0832-FBCC0EF814EE}"/>
+              </a:ext>
+            </a:extLst>
+          </p:cNvPr>
+          <p:cNvSpPr>
+            <a:spLocks noGrp="1"/>
+          </p:cNvSpPr>
+          <p:nvPr>
+            <p:ph type="sldNum" sz="quarter" idx="12"/>
+          </p:nvPr>
+        </p:nvSpPr>
+        <p:spPr>
+          <a:xfrm>
+            <a:off x="8737600" y="6356351"/>
+            <a:ext cx="2844800" cy="365125"/>
+          </a:xfrm>
+        </p:spPr>
+        <p:txBody>
+          <a:bodyPr/>
+          <a:lstStyle/>
+          <a:p>
+            <a:pPr>
+              <a:spcAft>
+                <a:spcPts val="600"/>
+              </a:spcAft>
+            </a:pPr>
+            <a:fld id="{B6F15528-21DE-4FAA-801E-634DDDAF4B2B}" type="slidenum">
+              <a:rPr lang="en-US" smtClean="0"/>
+              <a:pPr>
+                <a:spcAft>
+                  <a:spcPts val="600"/>
+                </a:spcAft>
+              </a:pPr>
+              <a:t>9</a:t>
+            </a:fld>
+            <a:endParaRPr lang="en-US"/>
+          </a:p>
+        </p:txBody>
+      </p:sp>
     </p:spTree>
     <p:extLst>
       <p:ext uri="{BB962C8B-B14F-4D97-AF65-F5344CB8AC3E}">
@@ -11660,23 +12070,6 @@
 </file>
 
 <file path=customXml/item1.xml><?xml version="1.0" encoding="utf-8"?>
-<?mso-contentType ?>
-<FormTemplates xmlns="http://schemas.microsoft.com/sharepoint/v3/contenttype/forms">
-  <Display>DocumentLibraryForm</Display>
-  <Edit>DocumentLibraryForm</Edit>
-  <New>DocumentLibraryForm</New>
-</FormTemplates>
-</file>
-
-<file path=customXml/item2.xml><?xml version="1.0" encoding="utf-8"?>
-<p:properties xmlns:p="http://schemas.microsoft.com/office/2006/metadata/properties" xmlns:xsi="http://www.w3.org/2001/XMLSchema-instance" xmlns:pc="http://schemas.microsoft.com/office/infopath/2007/PartnerControls">
-  <documentManagement>
-    <_activity xmlns="2e073d95-02bc-4c31-9707-1f7b5f2564cb" xsi:nil="true"/>
-  </documentManagement>
-</p:properties>
-</file>
-
-<file path=customXml/item3.xml><?xml version="1.0" encoding="utf-8"?>
 <ct:contentTypeSchema xmlns:ct="http://schemas.microsoft.com/office/2006/metadata/contentType" xmlns:ma="http://schemas.microsoft.com/office/2006/metadata/properties/metaAttributes" ct:_="" ma:_="" ma:contentTypeName="Document" ma:contentTypeID="0x01010074A7B4F4F87092419B4836663A979F72" ma:contentTypeVersion="12" ma:contentTypeDescription="Create a new document." ma:contentTypeScope="" ma:versionID="1705185788f4f7b8606867508f74a2eb">
   <xsd:schema xmlns:xsd="http://www.w3.org/2001/XMLSchema" xmlns:xs="http://www.w3.org/2001/XMLSchema" xmlns:p="http://schemas.microsoft.com/office/2006/metadata/properties" xmlns:ns3="2e073d95-02bc-4c31-9707-1f7b5f2564cb" xmlns:ns4="ecd595b7-854d-4129-8908-394d58e21de0" targetNamespace="http://schemas.microsoft.com/office/2006/metadata/properties" ma:root="true" ma:fieldsID="784458e58d0eaf4d4fb689770e9f109b" ns3:_="" ns4:_="">
     <xsd:import namespace="2e073d95-02bc-4c31-9707-1f7b5f2564cb"/>
@@ -11891,10 +12284,38 @@
 </ct:contentTypeSchema>
 </file>
 
+<file path=customXml/item2.xml><?xml version="1.0" encoding="utf-8"?>
+<p:properties xmlns:p="http://schemas.microsoft.com/office/2006/metadata/properties" xmlns:xsi="http://www.w3.org/2001/XMLSchema-instance" xmlns:pc="http://schemas.microsoft.com/office/infopath/2007/PartnerControls">
+  <documentManagement>
+    <_activity xmlns="2e073d95-02bc-4c31-9707-1f7b5f2564cb" xsi:nil="true"/>
+  </documentManagement>
+</p:properties>
+</file>
+
+<file path=customXml/item3.xml><?xml version="1.0" encoding="utf-8"?>
+<?mso-contentType ?>
+<FormTemplates xmlns="http://schemas.microsoft.com/sharepoint/v3/contenttype/forms">
+  <Display>DocumentLibraryForm</Display>
+  <Edit>DocumentLibraryForm</Edit>
+  <New>DocumentLibraryForm</New>
+</FormTemplates>
+</file>
+
 <file path=customXml/itemProps1.xml><?xml version="1.0" encoding="utf-8"?>
-<ds:datastoreItem xmlns:ds="http://schemas.openxmlformats.org/officeDocument/2006/customXml" ds:itemID="{9F0734DE-2FC5-4E40-8FD1-4F58D8D2451F}">
+<ds:datastoreItem xmlns:ds="http://schemas.openxmlformats.org/officeDocument/2006/customXml" ds:itemID="{5A847694-5366-4F35-BB14-1B44805440D6}">
   <ds:schemaRefs>
-    <ds:schemaRef ds:uri="http://schemas.microsoft.com/sharepoint/v3/contenttype/forms"/>
+    <ds:schemaRef ds:uri="http://schemas.microsoft.com/office/2006/metadata/contentType"/>
+    <ds:schemaRef ds:uri="http://schemas.microsoft.com/office/2006/metadata/properties/metaAttributes"/>
+    <ds:schemaRef ds:uri="http://www.w3.org/2001/XMLSchema"/>
+    <ds:schemaRef ds:uri="http://schemas.microsoft.com/office/2006/metadata/properties"/>
+    <ds:schemaRef ds:uri="2e073d95-02bc-4c31-9707-1f7b5f2564cb"/>
+    <ds:schemaRef ds:uri="ecd595b7-854d-4129-8908-394d58e21de0"/>
+    <ds:schemaRef ds:uri="http://schemas.microsoft.com/office/2006/documentManagement/types"/>
+    <ds:schemaRef ds:uri="http://schemas.microsoft.com/office/infopath/2007/PartnerControls"/>
+    <ds:schemaRef ds:uri="http://schemas.openxmlformats.org/package/2006/metadata/core-properties"/>
+    <ds:schemaRef ds:uri="http://purl.org/dc/elements/1.1/"/>
+    <ds:schemaRef ds:uri="http://purl.org/dc/terms/"/>
+    <ds:schemaRef ds:uri="http://schemas.microsoft.com/internal/obd"/>
   </ds:schemaRefs>
 </ds:datastoreItem>
 </file>
@@ -11917,20 +12338,9 @@
 </file>
 
 <file path=customXml/itemProps3.xml><?xml version="1.0" encoding="utf-8"?>
-<ds:datastoreItem xmlns:ds="http://schemas.openxmlformats.org/officeDocument/2006/customXml" ds:itemID="{5A847694-5366-4F35-BB14-1B44805440D6}">
+<ds:datastoreItem xmlns:ds="http://schemas.openxmlformats.org/officeDocument/2006/customXml" ds:itemID="{9F0734DE-2FC5-4E40-8FD1-4F58D8D2451F}">
   <ds:schemaRefs>
-    <ds:schemaRef ds:uri="http://schemas.microsoft.com/office/2006/metadata/contentType"/>
-    <ds:schemaRef ds:uri="http://schemas.microsoft.com/office/2006/metadata/properties/metaAttributes"/>
-    <ds:schemaRef ds:uri="http://www.w3.org/2001/XMLSchema"/>
-    <ds:schemaRef ds:uri="http://schemas.microsoft.com/office/2006/metadata/properties"/>
-    <ds:schemaRef ds:uri="2e073d95-02bc-4c31-9707-1f7b5f2564cb"/>
-    <ds:schemaRef ds:uri="ecd595b7-854d-4129-8908-394d58e21de0"/>
-    <ds:schemaRef ds:uri="http://schemas.microsoft.com/office/2006/documentManagement/types"/>
-    <ds:schemaRef ds:uri="http://schemas.microsoft.com/office/infopath/2007/PartnerControls"/>
-    <ds:schemaRef ds:uri="http://schemas.openxmlformats.org/package/2006/metadata/core-properties"/>
-    <ds:schemaRef ds:uri="http://purl.org/dc/elements/1.1/"/>
-    <ds:schemaRef ds:uri="http://purl.org/dc/terms/"/>
-    <ds:schemaRef ds:uri="http://schemas.microsoft.com/internal/obd"/>
+    <ds:schemaRef ds:uri="http://schemas.microsoft.com/sharepoint/v3/contenttype/forms"/>
   </ds:schemaRefs>
 </ds:datastoreItem>
 </file>